--- a/doctemplates/saweeklyreport/weekly_report_standard.pptx
+++ b/doctemplates/saweeklyreport/weekly_report_standard.pptx
@@ -2097,7 +2097,7 @@
                 <a:ea typeface="Calibri" pitchFamily="34" charset="-122"/>
                 <a:cs typeface="Calibri" pitchFamily="34" charset="-120"/>
               </a:rPr>
-              <a:t>{{FIELD_RETURNS}}</a:t>
+              <a:t>🚧  Retours terrain</a:t>
             </a:r>
             <a:endParaRPr lang="en-US" sz="1200" dirty="0"/>
           </a:p>
@@ -2136,7 +2136,7 @@
                 <a:ea typeface="Calibri" pitchFamily="34" charset="-122"/>
                 <a:cs typeface="Calibri" pitchFamily="34" charset="-120"/>
               </a:rPr>
-              <a:t/>
+              <a:t>{{FIELD_RETURNS}}</a:t>
             </a:r>
             <a:r>
               <a:rPr lang="en-US" sz="1300" dirty="0">
@@ -2309,7 +2309,7 @@
         <p:spPr>
           <a:xfrm>
             <a:off x="228600" y="3200040"/>
-            <a:ext cx="8686800" cy="640080"/>
+            <a:ext cx="8823960" cy="640080"/>
           </a:xfrm>
           <a:prstGeom prst="rect">
             <a:avLst/>
@@ -2334,7 +2334,7 @@
         <p:spPr>
           <a:xfrm>
             <a:off x="365760" y="3223800"/>
-            <a:ext cx="8412480" cy="280080"/>
+            <a:ext cx="8549640" cy="280080"/>
           </a:xfrm>
           <a:prstGeom prst="rect">
             <a:avLst/>
@@ -2373,7 +2373,7 @@
         <p:spPr>
           <a:xfrm>
             <a:off x="365760" y="3503880"/>
-            <a:ext cx="8412480" cy="280080"/>
+            <a:ext cx="8549640" cy="280080"/>
           </a:xfrm>
           <a:prstGeom prst="rect">
             <a:avLst/>
@@ -2467,7 +2467,7 @@
         <p:spPr>
           <a:xfrm>
             <a:off x="228600" y="3886200"/>
-            <a:ext cx="8686800" cy="640080"/>
+            <a:ext cx="8823960" cy="640080"/>
           </a:xfrm>
           <a:prstGeom prst="rect">
             <a:avLst/>
@@ -2492,7 +2492,7 @@
         <p:spPr>
           <a:xfrm>
             <a:off x="365760" y="3909960"/>
-            <a:ext cx="8412480" cy="280080"/>
+            <a:ext cx="8549640" cy="280080"/>
           </a:xfrm>
           <a:prstGeom prst="rect">
             <a:avLst/>
@@ -2531,7 +2531,7 @@
         <p:spPr>
           <a:xfrm>
             <a:off x="365760" y="4189920"/>
-            <a:ext cx="8412480" cy="280080"/>
+            <a:ext cx="8549640" cy="280080"/>
           </a:xfrm>
           <a:prstGeom prst="rect">
             <a:avLst/>
@@ -2570,7 +2570,7 @@
         <p:spPr>
           <a:xfrm>
             <a:off x="228600" y="4572360"/>
-            <a:ext cx="8686800" cy="548640"/>
+            <a:ext cx="8823960" cy="548640"/>
           </a:xfrm>
           <a:prstGeom prst="rect">
             <a:avLst/>
@@ -2595,7 +2595,7 @@
         <p:spPr>
           <a:xfrm>
             <a:off x="365760" y="4595400"/>
-            <a:ext cx="8412480" cy="274320"/>
+            <a:ext cx="8549640" cy="274320"/>
           </a:xfrm>
           <a:prstGeom prst="rect">
             <a:avLst/>

--- a/doctemplates/saweeklyreport/weekly_report_standard.pptx
+++ b/doctemplates/saweeklyreport/weekly_report_standard.pptx
@@ -108,7 +108,18 @@
   </p:defaultTextStyle>
   <p:extLst>
     <p:ext uri="{EFAFB233-063F-42B5-8137-9DF3F51BA10A}">
-      <p15:sldGuideLst xmlns:p15="http://schemas.microsoft.com/office/powerpoint/2012/main"/>
+      <p15:sldGuideLst xmlns:p15="http://schemas.microsoft.com/office/powerpoint/2012/main">
+        <p15:guide id="1" orient="horz" pos="1620" userDrawn="1">
+          <p15:clr>
+            <a:srgbClr val="A4A3A4"/>
+          </p15:clr>
+        </p15:guide>
+        <p15:guide id="2" pos="2880" userDrawn="1">
+          <p15:clr>
+            <a:srgbClr val="A4A3A4"/>
+          </p15:clr>
+        </p15:guide>
+      </p15:sldGuideLst>
     </p:ext>
   </p:extLst>
 </p:presentation>
@@ -2047,7 +2058,7 @@
         </p:nvSpPr>
         <p:spPr>
           <a:xfrm>
-            <a:off x="3246120" y="685800"/>
+            <a:off x="3177540" y="685800"/>
             <a:ext cx="2788920" cy="2423160"/>
           </a:xfrm>
           <a:prstGeom prst="rect">
@@ -2072,7 +2083,7 @@
         </p:nvSpPr>
         <p:spPr>
           <a:xfrm>
-            <a:off x="3383280" y="822960"/>
+            <a:off x="3314700" y="760680"/>
             <a:ext cx="2514600" cy="548640"/>
           </a:xfrm>
           <a:prstGeom prst="rect">
@@ -2111,8 +2122,8 @@
         </p:nvSpPr>
         <p:spPr>
           <a:xfrm>
-            <a:off x="3383280" y="1463040"/>
-            <a:ext cx="2514600" cy="731520"/>
+            <a:off x="3314700" y="1505400"/>
+            <a:ext cx="2514600" cy="463920"/>
           </a:xfrm>
           <a:prstGeom prst="rect">
             <a:avLst/>
@@ -2124,76 +2135,16 @@
           <a:bodyPr wrap="square" lIns="0" tIns="0" rIns="0" bIns="0" rtlCol="0" anchor="ctr"/>
           <a:lstStyle/>
           <a:p>
-            <a:pPr marL="0" indent="0">
-              <a:buNone/>
-            </a:pPr>
-            <a:r>
-              <a:rPr lang="en-US" sz="1300" dirty="0" err="1">
+            <a:r>
+              <a:rPr lang="en-US" sz="1500" b="1" dirty="0">
                 <a:solidFill>
                   <a:srgbClr val="FFFFFF"/>
                 </a:solidFill>
                 <a:latin typeface="Calibri" pitchFamily="34" charset="0"/>
-                <a:ea typeface="Calibri" pitchFamily="34" charset="-122"/>
                 <a:cs typeface="Calibri" pitchFamily="34" charset="-120"/>
               </a:rPr>
               <a:t>{{FIELD_RETURNS}}</a:t>
             </a:r>
-            <a:r>
-              <a:rPr lang="en-US" sz="1300" dirty="0">
-                <a:solidFill>
-                  <a:srgbClr val="FFFFFF"/>
-                </a:solidFill>
-                <a:latin typeface="Calibri" pitchFamily="34" charset="0"/>
-                <a:ea typeface="Calibri" pitchFamily="34" charset="-122"/>
-                <a:cs typeface="Calibri" pitchFamily="34" charset="-120"/>
-              </a:rPr>
-              <a:t/>
-            </a:r>
-            <a:r>
-              <a:rPr lang="en-US" sz="1300" dirty="0" err="1">
-                <a:solidFill>
-                  <a:srgbClr val="FFFFFF"/>
-                </a:solidFill>
-                <a:latin typeface="Calibri" pitchFamily="34" charset="0"/>
-                <a:ea typeface="Calibri" pitchFamily="34" charset="-122"/>
-                <a:cs typeface="Calibri" pitchFamily="34" charset="-120"/>
-              </a:rPr>
-              <a:t/>
-            </a:r>
-            <a:r>
-              <a:rPr lang="en-US" sz="1300" dirty="0">
-                <a:solidFill>
-                  <a:srgbClr val="FFFFFF"/>
-                </a:solidFill>
-                <a:latin typeface="Calibri" pitchFamily="34" charset="0"/>
-                <a:ea typeface="Calibri" pitchFamily="34" charset="-122"/>
-                <a:cs typeface="Calibri" pitchFamily="34" charset="-120"/>
-              </a:rPr>
-              <a:t/>
-            </a:r>
-            <a:r>
-              <a:rPr lang="en-US" sz="1300" dirty="0" err="1">
-                <a:solidFill>
-                  <a:srgbClr val="FFFFFF"/>
-                </a:solidFill>
-                <a:latin typeface="Calibri" pitchFamily="34" charset="0"/>
-                <a:ea typeface="Calibri" pitchFamily="34" charset="-122"/>
-                <a:cs typeface="Calibri" pitchFamily="34" charset="-120"/>
-              </a:rPr>
-              <a:t/>
-            </a:r>
-            <a:r>
-              <a:rPr lang="en-US" sz="1300" dirty="0">
-                <a:solidFill>
-                  <a:srgbClr val="FFFFFF"/>
-                </a:solidFill>
-                <a:latin typeface="Calibri" pitchFamily="34" charset="0"/>
-                <a:ea typeface="Calibri" pitchFamily="34" charset="-122"/>
-                <a:cs typeface="Calibri" pitchFamily="34" charset="-120"/>
-              </a:rPr>
-              <a:t/>
-            </a:r>
-            <a:endParaRPr lang="en-US" sz="1300" dirty="0"/>
           </a:p>
         </p:txBody>
       </p:sp>
@@ -2205,7 +2156,7 @@
         </p:nvSpPr>
         <p:spPr>
           <a:xfrm>
-            <a:off x="6263640" y="685800"/>
+            <a:off x="6126480" y="685800"/>
             <a:ext cx="2788920" cy="2423160"/>
           </a:xfrm>
           <a:prstGeom prst="rect">
@@ -2230,7 +2181,7 @@
         </p:nvSpPr>
         <p:spPr>
           <a:xfrm>
-            <a:off x="6400800" y="822960"/>
+            <a:off x="6263640" y="822960"/>
             <a:ext cx="2514600" cy="411480"/>
           </a:xfrm>
           <a:prstGeom prst="rect">
@@ -2269,7 +2220,7 @@
         </p:nvSpPr>
         <p:spPr>
           <a:xfrm>
-            <a:off x="6400800" y="1463040"/>
+            <a:off x="6263640" y="1463040"/>
             <a:ext cx="2514600" cy="548640"/>
           </a:xfrm>
           <a:prstGeom prst="rect">
@@ -2309,7 +2260,7 @@
         <p:spPr>
           <a:xfrm>
             <a:off x="228600" y="3200040"/>
-            <a:ext cx="8823960" cy="640080"/>
+            <a:ext cx="8686800" cy="640080"/>
           </a:xfrm>
           <a:prstGeom prst="rect">
             <a:avLst/>
@@ -2346,49 +2297,68 @@
           <a:bodyPr wrap="square" lIns="0" tIns="0" rIns="0" bIns="0" rtlCol="0" anchor="ctr"/>
           <a:lstStyle/>
           <a:p>
+            <a:r>
+              <a:rPr lang="en-US" sz="1300" b="1" dirty="0">
+                <a:solidFill>
+                  <a:srgbClr val="FFFFFF"/>
+                </a:solidFill>
+                <a:latin typeface="Calibri" pitchFamily="34" charset="0"/>
+                <a:ea typeface="Calibri" pitchFamily="34" charset="-122"/>
+                <a:cs typeface="Calibri" pitchFamily="34" charset="-120"/>
+              </a:rPr>
+              <a:t>🔧  SAV &amp; MAINTENANCE — Interventions </a:t>
+            </a:r>
+            <a:r>
+              <a:rPr lang="en-US" sz="1300" b="1" dirty="0" err="1">
+                <a:solidFill>
+                  <a:srgbClr val="FFFFFF"/>
+                </a:solidFill>
+                <a:latin typeface="Calibri" pitchFamily="34" charset="0"/>
+                <a:ea typeface="Calibri" pitchFamily="34" charset="-122"/>
+                <a:cs typeface="Calibri" pitchFamily="34" charset="-120"/>
+              </a:rPr>
+              <a:t>semaine</a:t>
+            </a:r>
+            <a:r>
+              <a:rPr lang="en-US" sz="1300" b="1" dirty="0">
+                <a:solidFill>
+                  <a:srgbClr val="FFFFFF"/>
+                </a:solidFill>
+                <a:latin typeface="Calibri" pitchFamily="34" charset="0"/>
+                <a:ea typeface="Calibri" pitchFamily="34" charset="-122"/>
+                <a:cs typeface="Calibri" pitchFamily="34" charset="-120"/>
+              </a:rPr>
+              <a:t> {{WEEK_LABEL}}</a:t>
+            </a:r>
+            <a:endParaRPr lang="en-US" sz="1300" dirty="0"/>
+          </a:p>
+        </p:txBody>
+      </p:sp>
+      <p:sp>
+        <p:nvSpPr>
+          <p:cNvPr id="16" name="Text 14"/>
+          <p:cNvSpPr/>
+          <p:nvPr/>
+        </p:nvSpPr>
+        <p:spPr>
+          <a:xfrm>
+            <a:off x="365760" y="3503880"/>
+            <a:ext cx="8549640" cy="280080"/>
+          </a:xfrm>
+          <a:prstGeom prst="rect">
+            <a:avLst/>
+          </a:prstGeom>
+          <a:noFill/>
+          <a:ln/>
+        </p:spPr>
+        <p:txBody>
+          <a:bodyPr wrap="square" lIns="0" tIns="0" rIns="0" bIns="0" rtlCol="0" anchor="ctr"/>
+          <a:lstStyle/>
+          <a:p>
             <a:pPr marL="0" indent="0">
               <a:buNone/>
             </a:pPr>
             <a:r>
-              <a:rPr lang="en-US" sz="1300" b="1" dirty="0">
-                <a:solidFill>
-                  <a:srgbClr val="FFFFFF"/>
-                </a:solidFill>
-                <a:latin typeface="Calibri" pitchFamily="34" charset="0"/>
-                <a:ea typeface="Calibri" pitchFamily="34" charset="-122"/>
-                <a:cs typeface="Calibri" pitchFamily="34" charset="-120"/>
-              </a:rPr>
-              <a:t>🔧  SAV &amp; MAINTENANCE — Interventions semaine S23</a:t>
-            </a:r>
-            <a:endParaRPr lang="en-US" sz="1300" dirty="0"/>
-          </a:p>
-        </p:txBody>
-      </p:sp>
-      <p:sp>
-        <p:nvSpPr>
-          <p:cNvPr id="16" name="Text 14"/>
-          <p:cNvSpPr/>
-          <p:nvPr/>
-        </p:nvSpPr>
-        <p:spPr>
-          <a:xfrm>
-            <a:off x="365760" y="3503880"/>
-            <a:ext cx="8549640" cy="280080"/>
-          </a:xfrm>
-          <a:prstGeom prst="rect">
-            <a:avLst/>
-          </a:prstGeom>
-          <a:noFill/>
-          <a:ln/>
-        </p:spPr>
-        <p:txBody>
-          <a:bodyPr wrap="square" lIns="0" tIns="0" rIns="0" bIns="0" rtlCol="0" anchor="ctr"/>
-          <a:lstStyle/>
-          <a:p>
-            <a:pPr marL="0" indent="0">
-              <a:buNone/>
-            </a:pPr>
-            <a:r>
               <a:rPr lang="en-US" sz="1100" dirty="0">
                 <a:solidFill>
                   <a:srgbClr val="E8D5F5"/>
@@ -2399,61 +2369,6 @@
               </a:rPr>
               <a:t>{{SERVICE_SUMMARY}}</a:t>
             </a:r>
-            <a:r>
-              <a:rPr lang="en-US" sz="1100" dirty="0" err="1">
-                <a:solidFill>
-                  <a:srgbClr val="E8D5F5"/>
-                </a:solidFill>
-                <a:latin typeface="Calibri" pitchFamily="34" charset="0"/>
-                <a:ea typeface="Calibri" pitchFamily="34" charset="-122"/>
-                <a:cs typeface="Calibri" pitchFamily="34" charset="-120"/>
-              </a:rPr>
-              <a:t/>
-            </a:r>
-            <a:r>
-              <a:rPr lang="en-US" sz="1100" dirty="0">
-                <a:solidFill>
-                  <a:srgbClr val="E8D5F5"/>
-                </a:solidFill>
-                <a:latin typeface="Calibri" pitchFamily="34" charset="0"/>
-                <a:ea typeface="Calibri" pitchFamily="34" charset="-122"/>
-                <a:cs typeface="Calibri" pitchFamily="34" charset="-120"/>
-              </a:rPr>
-              <a:t/>
-            </a:r>
-            <a:r>
-              <a:rPr lang="en-US" sz="1100" dirty="0" err="1">
-                <a:solidFill>
-                  <a:srgbClr val="E8D5F5"/>
-                </a:solidFill>
-                <a:latin typeface="Calibri" pitchFamily="34" charset="0"/>
-                <a:ea typeface="Calibri" pitchFamily="34" charset="-122"/>
-                <a:cs typeface="Calibri" pitchFamily="34" charset="-120"/>
-              </a:rPr>
-              <a:t/>
-            </a:r>
-            <a:r>
-              <a:rPr lang="en-US" sz="1100">
-                <a:solidFill>
-                  <a:srgbClr val="E8D5F5"/>
-                </a:solidFill>
-                <a:latin typeface="Calibri" pitchFamily="34" charset="0"/>
-                <a:ea typeface="Calibri" pitchFamily="34" charset="-122"/>
-                <a:cs typeface="Calibri" pitchFamily="34" charset="-120"/>
-              </a:rPr>
-              <a:t/>
-            </a:r>
-            <a:r>
-              <a:rPr lang="en-US" sz="1100" dirty="0">
-                <a:solidFill>
-                  <a:srgbClr val="E8D5F5"/>
-                </a:solidFill>
-                <a:latin typeface="Calibri" pitchFamily="34" charset="0"/>
-                <a:ea typeface="Calibri" pitchFamily="34" charset="-122"/>
-                <a:cs typeface="Calibri" pitchFamily="34" charset="-120"/>
-              </a:rPr>
-              <a:t/>
-            </a:r>
             <a:endParaRPr lang="en-US" sz="1100" dirty="0"/>
           </a:p>
         </p:txBody>
@@ -2467,7 +2382,7 @@
         <p:spPr>
           <a:xfrm>
             <a:off x="228600" y="3886200"/>
-            <a:ext cx="8823960" cy="640080"/>
+            <a:ext cx="8686800" cy="640080"/>
           </a:xfrm>
           <a:prstGeom prst="rect">
             <a:avLst/>
@@ -2504,49 +2419,68 @@
           <a:bodyPr wrap="square" lIns="0" tIns="0" rIns="0" bIns="0" rtlCol="0" anchor="ctr"/>
           <a:lstStyle/>
           <a:p>
+            <a:r>
+              <a:rPr lang="en-US" sz="1300" b="1" dirty="0">
+                <a:solidFill>
+                  <a:srgbClr val="FFFFFF"/>
+                </a:solidFill>
+                <a:latin typeface="Calibri" pitchFamily="34" charset="0"/>
+                <a:ea typeface="Calibri" pitchFamily="34" charset="-122"/>
+                <a:cs typeface="Calibri" pitchFamily="34" charset="-120"/>
+              </a:rPr>
+              <a:t>👷  TECHNICIENS MOBILISÉS — </a:t>
+            </a:r>
+            <a:r>
+              <a:rPr lang="en-US" sz="1300" b="1" dirty="0" err="1">
+                <a:solidFill>
+                  <a:srgbClr val="FFFFFF"/>
+                </a:solidFill>
+                <a:latin typeface="Calibri" pitchFamily="34" charset="0"/>
+                <a:ea typeface="Calibri" pitchFamily="34" charset="-122"/>
+                <a:cs typeface="Calibri" pitchFamily="34" charset="-120"/>
+              </a:rPr>
+              <a:t>Semaine</a:t>
+            </a:r>
+            <a:r>
+              <a:rPr lang="en-US" sz="1300" b="1" dirty="0">
+                <a:solidFill>
+                  <a:srgbClr val="FFFFFF"/>
+                </a:solidFill>
+                <a:latin typeface="Calibri" pitchFamily="34" charset="0"/>
+                <a:ea typeface="Calibri" pitchFamily="34" charset="-122"/>
+                <a:cs typeface="Calibri" pitchFamily="34" charset="-120"/>
+              </a:rPr>
+              <a:t> {{WEEK_LABEL}}</a:t>
+            </a:r>
+            <a:endParaRPr lang="en-US" sz="1400" dirty="0"/>
+          </a:p>
+        </p:txBody>
+      </p:sp>
+      <p:sp>
+        <p:nvSpPr>
+          <p:cNvPr id="19" name="Text 17"/>
+          <p:cNvSpPr/>
+          <p:nvPr/>
+        </p:nvSpPr>
+        <p:spPr>
+          <a:xfrm>
+            <a:off x="365760" y="4189920"/>
+            <a:ext cx="8549640" cy="280080"/>
+          </a:xfrm>
+          <a:prstGeom prst="rect">
+            <a:avLst/>
+          </a:prstGeom>
+          <a:noFill/>
+          <a:ln/>
+        </p:spPr>
+        <p:txBody>
+          <a:bodyPr wrap="square" lIns="0" tIns="0" rIns="0" bIns="0" rtlCol="0" anchor="ctr"/>
+          <a:lstStyle/>
+          <a:p>
             <a:pPr marL="0" indent="0">
               <a:buNone/>
             </a:pPr>
             <a:r>
-              <a:rPr lang="en-US" sz="1300" b="1" dirty="0">
-                <a:solidFill>
-                  <a:srgbClr val="FFFFFF"/>
-                </a:solidFill>
-                <a:latin typeface="Calibri" pitchFamily="34" charset="0"/>
-                <a:ea typeface="Calibri" pitchFamily="34" charset="-122"/>
-                <a:cs typeface="Calibri" pitchFamily="34" charset="-120"/>
-              </a:rPr>
-              <a:t>👷  TECHNICIENS MOBILISÉS — Semaine S23</a:t>
-            </a:r>
-            <a:endParaRPr lang="en-US" sz="1300" dirty="0"/>
-          </a:p>
-        </p:txBody>
-      </p:sp>
-      <p:sp>
-        <p:nvSpPr>
-          <p:cNvPr id="19" name="Text 17"/>
-          <p:cNvSpPr/>
-          <p:nvPr/>
-        </p:nvSpPr>
-        <p:spPr>
-          <a:xfrm>
-            <a:off x="365760" y="4189920"/>
-            <a:ext cx="8549640" cy="280080"/>
-          </a:xfrm>
-          <a:prstGeom prst="rect">
-            <a:avLst/>
-          </a:prstGeom>
-          <a:noFill/>
-          <a:ln/>
-        </p:spPr>
-        <p:txBody>
-          <a:bodyPr wrap="square" lIns="0" tIns="0" rIns="0" bIns="0" rtlCol="0" anchor="ctr"/>
-          <a:lstStyle/>
-          <a:p>
-            <a:pPr marL="0" indent="0">
-              <a:buNone/>
-            </a:pPr>
-            <a:r>
               <a:rPr lang="en-US" sz="1100" dirty="0">
                 <a:solidFill>
                   <a:srgbClr val="AACFAA"/>
@@ -2570,7 +2504,7 @@
         <p:spPr>
           <a:xfrm>
             <a:off x="228600" y="4572360"/>
-            <a:ext cx="8823960" cy="548640"/>
+            <a:ext cx="8686800" cy="548640"/>
           </a:xfrm>
           <a:prstGeom prst="rect">
             <a:avLst/>
@@ -2607,43 +2541,107 @@
           <a:bodyPr wrap="square" lIns="0" tIns="0" rIns="0" bIns="0" rtlCol="0" anchor="ctr"/>
           <a:lstStyle/>
           <a:p>
-            <a:pPr marL="0" indent="0">
+            <a:r>
+              <a:rPr lang="fr-FR" sz="1200" b="1" dirty="0">
+                <a:solidFill>
+                  <a:srgbClr val="FFFFFF"/>
+                </a:solidFill>
+                <a:latin typeface="Calibri" pitchFamily="34" charset="0"/>
+                <a:ea typeface="Calibri" pitchFamily="34" charset="-122"/>
+                <a:cs typeface="Calibri" pitchFamily="34" charset="-120"/>
+              </a:rPr>
+              <a:t>🦺 MESSAGE SECURIT</a:t>
+            </a:r>
+            <a:r>
+              <a:rPr lang="en-US" sz="1200" b="1" dirty="0">
+                <a:solidFill>
+                  <a:srgbClr val="FFFFFF"/>
+                </a:solidFill>
+                <a:latin typeface="Calibri" pitchFamily="34" charset="0"/>
+                <a:ea typeface="Calibri" pitchFamily="34" charset="-122"/>
+                <a:cs typeface="Calibri" pitchFamily="34" charset="-120"/>
+              </a:rPr>
+              <a:t>É</a:t>
+            </a:r>
+            <a:endParaRPr lang="en-US" sz="1200" dirty="0"/>
+          </a:p>
+        </p:txBody>
+      </p:sp>
+      <p:sp>
+        <p:nvSpPr>
+          <p:cNvPr id="20" name="Text 17">
+            <a:extLst>
+              <a:ext uri="{FF2B5EF4-FFF2-40B4-BE49-F238E27FC236}">
+                <a16:creationId xmlns:a16="http://schemas.microsoft.com/office/drawing/2014/main" id="{82994D02-F026-7490-C82F-4AED491E070D}"/>
+              </a:ext>
+            </a:extLst>
+          </p:cNvPr>
+          <p:cNvSpPr/>
+          <p:nvPr/>
+        </p:nvSpPr>
+        <p:spPr>
+          <a:xfrm>
+            <a:off x="365760" y="4785596"/>
+            <a:ext cx="8549640" cy="280080"/>
+          </a:xfrm>
+          <a:prstGeom prst="rect">
+            <a:avLst/>
+          </a:prstGeom>
+          <a:noFill/>
+          <a:ln/>
+        </p:spPr>
+        <p:txBody>
+          <a:bodyPr wrap="square" lIns="0" tIns="0" rIns="0" bIns="0" rtlCol="0" anchor="ctr"/>
+          <a:lstStyle/>
+          <a:p>
+            <a:pPr marL="0" marR="0" lvl="0" indent="0" algn="l" defTabSz="914400" rtl="0" eaLnBrk="1" fontAlgn="auto" latinLnBrk="0" hangingPunct="1">
+              <a:lnSpc>
+                <a:spcPct val="100000"/>
+              </a:lnSpc>
+              <a:spcBef>
+                <a:spcPts val="0"/>
+              </a:spcBef>
+              <a:spcAft>
+                <a:spcPts val="0"/>
+              </a:spcAft>
+              <a:buClrTx/>
+              <a:buSzTx/>
+              <a:buFontTx/>
               <a:buNone/>
+              <a:tabLst/>
+              <a:defRPr/>
             </a:pPr>
             <a:r>
-              <a:rPr lang="en-US" sz="1200" b="1" dirty="0">
-                <a:solidFill>
-                  <a:srgbClr val="FFFFFF"/>
-                </a:solidFill>
+              <a:rPr kumimoji="0" lang="en-US" sz="1100" b="0" i="0" u="none" strike="noStrike" kern="1200" cap="none" spc="0" normalizeH="0" baseline="0" noProof="0" dirty="0">
+                <a:ln>
+                  <a:noFill/>
+                </a:ln>
+                <a:solidFill>
+                  <a:srgbClr val="AACFAA"/>
+                </a:solidFill>
+                <a:effectLst/>
+                <a:uLnTx/>
+                <a:uFillTx/>
                 <a:latin typeface="Calibri" pitchFamily="34" charset="0"/>
                 <a:ea typeface="Calibri" pitchFamily="34" charset="-122"/>
                 <a:cs typeface="Calibri" pitchFamily="34" charset="-120"/>
               </a:rPr>
               <a:t>{{SAFETY_MESSAGE}}</a:t>
             </a:r>
-            <a:r>
-              <a:rPr lang="en-US" sz="1200" b="1" dirty="0" err="1">
-                <a:solidFill>
-                  <a:srgbClr val="FFFFFF"/>
-                </a:solidFill>
-                <a:latin typeface="Calibri" pitchFamily="34" charset="0"/>
-                <a:ea typeface="Calibri" pitchFamily="34" charset="-122"/>
-                <a:cs typeface="Calibri" pitchFamily="34" charset="-120"/>
-              </a:rPr>
-              <a:t/>
-            </a:r>
-            <a:r>
-              <a:rPr lang="en-US" sz="1200" b="1" dirty="0">
-                <a:solidFill>
-                  <a:srgbClr val="FFFFFF"/>
-                </a:solidFill>
-                <a:latin typeface="Calibri" pitchFamily="34" charset="0"/>
-                <a:ea typeface="Calibri" pitchFamily="34" charset="-122"/>
-                <a:cs typeface="Calibri" pitchFamily="34" charset="-120"/>
-              </a:rPr>
-              <a:t/>
-            </a:r>
-            <a:endParaRPr lang="en-US" sz="1200" dirty="0"/>
+            <a:endParaRPr kumimoji="0" lang="en-US" sz="1100" b="0" i="0" u="none" strike="noStrike" kern="1200" cap="none" spc="0" normalizeH="0" baseline="0" noProof="0" dirty="0">
+              <a:ln>
+                <a:noFill/>
+              </a:ln>
+              <a:solidFill>
+                <a:prstClr val="black"/>
+              </a:solidFill>
+              <a:effectLst/>
+              <a:uLnTx/>
+              <a:uFillTx/>
+              <a:latin typeface="Calibri" panose="020F0502020204030204"/>
+              <a:ea typeface="+mn-ea"/>
+              <a:cs typeface="+mn-cs"/>
+            </a:endParaRPr>
           </a:p>
         </p:txBody>
       </p:sp>
